--- a/110殿中敬拜.pptx
+++ b/110殿中敬拜.pptx
@@ -167,7 +167,7 @@
           <a:lstStyle/>
           <a:p>
             <a:r>
-              <a:rPr lang="en-US" altLang="zh-TW" smtClean="0"/>
+              <a:rPr lang="en-US" altLang="zh-TW"/>
               <a:t>Click to edit Master title style</a:t>
             </a:r>
             <a:endParaRPr lang="zh-TW" altLang="en-US"/>
@@ -286,7 +286,7 @@
           </a:lstStyle>
           <a:p>
             <a:r>
-              <a:rPr lang="en-US" altLang="zh-TW" smtClean="0"/>
+              <a:rPr lang="en-US" altLang="zh-TW"/>
               <a:t>Click to edit Master subtitle style</a:t>
             </a:r>
             <a:endParaRPr lang="zh-TW" altLang="en-US"/>
@@ -311,7 +311,7 @@
             <a:fld id="{86B5546F-C09B-4E63-ABC5-F7C86A7E8D66}" type="datetimeFigureOut">
               <a:rPr lang="en-US" smtClean="0"/>
               <a:pPr/>
-              <a:t>10/23/2021</a:t>
+              <a:t>12/14/2024</a:t>
             </a:fld>
             <a:endParaRPr lang="en-US"/>
           </a:p>
@@ -406,7 +406,7 @@
           <a:lstStyle/>
           <a:p>
             <a:r>
-              <a:rPr lang="en-US" altLang="zh-TW" smtClean="0"/>
+              <a:rPr lang="en-US" altLang="zh-TW"/>
               <a:t>Click to edit Master title style</a:t>
             </a:r>
             <a:endParaRPr lang="zh-TW" altLang="en-US"/>
@@ -430,35 +430,35 @@
           <a:p>
             <a:pPr lvl="0"/>
             <a:r>
-              <a:rPr lang="en-US" altLang="zh-TW" smtClean="0"/>
+              <a:rPr lang="en-US" altLang="zh-TW"/>
               <a:t>Edit Master text styles</a:t>
             </a:r>
           </a:p>
           <a:p>
             <a:pPr lvl="1"/>
             <a:r>
-              <a:rPr lang="en-US" altLang="zh-TW" smtClean="0"/>
+              <a:rPr lang="en-US" altLang="zh-TW"/>
               <a:t>Second level</a:t>
             </a:r>
           </a:p>
           <a:p>
             <a:pPr lvl="2"/>
             <a:r>
-              <a:rPr lang="en-US" altLang="zh-TW" smtClean="0"/>
+              <a:rPr lang="en-US" altLang="zh-TW"/>
               <a:t>Third level</a:t>
             </a:r>
           </a:p>
           <a:p>
             <a:pPr lvl="3"/>
             <a:r>
-              <a:rPr lang="en-US" altLang="zh-TW" smtClean="0"/>
+              <a:rPr lang="en-US" altLang="zh-TW"/>
               <a:t>Fourth level</a:t>
             </a:r>
           </a:p>
           <a:p>
             <a:pPr lvl="4"/>
             <a:r>
-              <a:rPr lang="en-US" altLang="zh-TW" smtClean="0"/>
+              <a:rPr lang="en-US" altLang="zh-TW"/>
               <a:t>Fifth level</a:t>
             </a:r>
             <a:endParaRPr lang="zh-TW" altLang="en-US"/>
@@ -483,7 +483,7 @@
             <a:fld id="{86B5546F-C09B-4E63-ABC5-F7C86A7E8D66}" type="datetimeFigureOut">
               <a:rPr lang="en-US" smtClean="0"/>
               <a:pPr/>
-              <a:t>10/23/2021</a:t>
+              <a:t>12/14/2024</a:t>
             </a:fld>
             <a:endParaRPr lang="en-US"/>
           </a:p>
@@ -583,7 +583,7 @@
           <a:lstStyle/>
           <a:p>
             <a:r>
-              <a:rPr lang="en-US" altLang="zh-TW" smtClean="0"/>
+              <a:rPr lang="en-US" altLang="zh-TW"/>
               <a:t>Click to edit Master title style</a:t>
             </a:r>
             <a:endParaRPr lang="zh-TW" altLang="en-US"/>
@@ -612,35 +612,35 @@
           <a:p>
             <a:pPr lvl="0"/>
             <a:r>
-              <a:rPr lang="en-US" altLang="zh-TW" smtClean="0"/>
+              <a:rPr lang="en-US" altLang="zh-TW"/>
               <a:t>Edit Master text styles</a:t>
             </a:r>
           </a:p>
           <a:p>
             <a:pPr lvl="1"/>
             <a:r>
-              <a:rPr lang="en-US" altLang="zh-TW" smtClean="0"/>
+              <a:rPr lang="en-US" altLang="zh-TW"/>
               <a:t>Second level</a:t>
             </a:r>
           </a:p>
           <a:p>
             <a:pPr lvl="2"/>
             <a:r>
-              <a:rPr lang="en-US" altLang="zh-TW" smtClean="0"/>
+              <a:rPr lang="en-US" altLang="zh-TW"/>
               <a:t>Third level</a:t>
             </a:r>
           </a:p>
           <a:p>
             <a:pPr lvl="3"/>
             <a:r>
-              <a:rPr lang="en-US" altLang="zh-TW" smtClean="0"/>
+              <a:rPr lang="en-US" altLang="zh-TW"/>
               <a:t>Fourth level</a:t>
             </a:r>
           </a:p>
           <a:p>
             <a:pPr lvl="4"/>
             <a:r>
-              <a:rPr lang="en-US" altLang="zh-TW" smtClean="0"/>
+              <a:rPr lang="en-US" altLang="zh-TW"/>
               <a:t>Fifth level</a:t>
             </a:r>
             <a:endParaRPr lang="zh-TW" altLang="en-US"/>
@@ -665,7 +665,7 @@
             <a:fld id="{86B5546F-C09B-4E63-ABC5-F7C86A7E8D66}" type="datetimeFigureOut">
               <a:rPr lang="en-US" smtClean="0"/>
               <a:pPr/>
-              <a:t>10/23/2021</a:t>
+              <a:t>12/14/2024</a:t>
             </a:fld>
             <a:endParaRPr lang="en-US"/>
           </a:p>
@@ -760,7 +760,7 @@
           <a:lstStyle/>
           <a:p>
             <a:r>
-              <a:rPr lang="en-US" altLang="zh-TW" smtClean="0"/>
+              <a:rPr lang="en-US" altLang="zh-TW"/>
               <a:t>Click to edit Master title style</a:t>
             </a:r>
             <a:endParaRPr lang="zh-TW" altLang="en-US"/>
@@ -784,35 +784,35 @@
           <a:p>
             <a:pPr lvl="0"/>
             <a:r>
-              <a:rPr lang="en-US" altLang="zh-TW" smtClean="0"/>
+              <a:rPr lang="en-US" altLang="zh-TW"/>
               <a:t>Edit Master text styles</a:t>
             </a:r>
           </a:p>
           <a:p>
             <a:pPr lvl="1"/>
             <a:r>
-              <a:rPr lang="en-US" altLang="zh-TW" smtClean="0"/>
+              <a:rPr lang="en-US" altLang="zh-TW"/>
               <a:t>Second level</a:t>
             </a:r>
           </a:p>
           <a:p>
             <a:pPr lvl="2"/>
             <a:r>
-              <a:rPr lang="en-US" altLang="zh-TW" smtClean="0"/>
+              <a:rPr lang="en-US" altLang="zh-TW"/>
               <a:t>Third level</a:t>
             </a:r>
           </a:p>
           <a:p>
             <a:pPr lvl="3"/>
             <a:r>
-              <a:rPr lang="en-US" altLang="zh-TW" smtClean="0"/>
+              <a:rPr lang="en-US" altLang="zh-TW"/>
               <a:t>Fourth level</a:t>
             </a:r>
           </a:p>
           <a:p>
             <a:pPr lvl="4"/>
             <a:r>
-              <a:rPr lang="en-US" altLang="zh-TW" smtClean="0"/>
+              <a:rPr lang="en-US" altLang="zh-TW"/>
               <a:t>Fifth level</a:t>
             </a:r>
             <a:endParaRPr lang="zh-TW" altLang="en-US"/>
@@ -837,7 +837,7 @@
             <a:fld id="{86B5546F-C09B-4E63-ABC5-F7C86A7E8D66}" type="datetimeFigureOut">
               <a:rPr lang="en-US" smtClean="0"/>
               <a:pPr/>
-              <a:t>10/23/2021</a:t>
+              <a:t>12/14/2024</a:t>
             </a:fld>
             <a:endParaRPr lang="en-US"/>
           </a:p>
@@ -941,7 +941,7 @@
           </a:lstStyle>
           <a:p>
             <a:r>
-              <a:rPr lang="en-US" altLang="zh-TW" smtClean="0"/>
+              <a:rPr lang="en-US" altLang="zh-TW"/>
               <a:t>Click to edit Master title style</a:t>
             </a:r>
             <a:endParaRPr lang="zh-TW" altLang="en-US"/>
@@ -1061,7 +1061,7 @@
           <a:p>
             <a:pPr lvl="0"/>
             <a:r>
-              <a:rPr lang="en-US" altLang="zh-TW" smtClean="0"/>
+              <a:rPr lang="en-US" altLang="zh-TW"/>
               <a:t>Edit Master text styles</a:t>
             </a:r>
           </a:p>
@@ -1085,7 +1085,7 @@
             <a:fld id="{86B5546F-C09B-4E63-ABC5-F7C86A7E8D66}" type="datetimeFigureOut">
               <a:rPr lang="en-US" smtClean="0"/>
               <a:pPr/>
-              <a:t>10/23/2021</a:t>
+              <a:t>12/14/2024</a:t>
             </a:fld>
             <a:endParaRPr lang="en-US"/>
           </a:p>
@@ -1180,7 +1180,7 @@
           <a:lstStyle/>
           <a:p>
             <a:r>
-              <a:rPr lang="en-US" altLang="zh-TW" smtClean="0"/>
+              <a:rPr lang="en-US" altLang="zh-TW"/>
               <a:t>Click to edit Master title style</a:t>
             </a:r>
             <a:endParaRPr lang="zh-TW" altLang="en-US"/>
@@ -1237,35 +1237,35 @@
           <a:p>
             <a:pPr lvl="0"/>
             <a:r>
-              <a:rPr lang="en-US" altLang="zh-TW" smtClean="0"/>
+              <a:rPr lang="en-US" altLang="zh-TW"/>
               <a:t>Edit Master text styles</a:t>
             </a:r>
           </a:p>
           <a:p>
             <a:pPr lvl="1"/>
             <a:r>
-              <a:rPr lang="en-US" altLang="zh-TW" smtClean="0"/>
+              <a:rPr lang="en-US" altLang="zh-TW"/>
               <a:t>Second level</a:t>
             </a:r>
           </a:p>
           <a:p>
             <a:pPr lvl="2"/>
             <a:r>
-              <a:rPr lang="en-US" altLang="zh-TW" smtClean="0"/>
+              <a:rPr lang="en-US" altLang="zh-TW"/>
               <a:t>Third level</a:t>
             </a:r>
           </a:p>
           <a:p>
             <a:pPr lvl="3"/>
             <a:r>
-              <a:rPr lang="en-US" altLang="zh-TW" smtClean="0"/>
+              <a:rPr lang="en-US" altLang="zh-TW"/>
               <a:t>Fourth level</a:t>
             </a:r>
           </a:p>
           <a:p>
             <a:pPr lvl="4"/>
             <a:r>
-              <a:rPr lang="en-US" altLang="zh-TW" smtClean="0"/>
+              <a:rPr lang="en-US" altLang="zh-TW"/>
               <a:t>Fifth level</a:t>
             </a:r>
             <a:endParaRPr lang="zh-TW" altLang="en-US"/>
@@ -1322,35 +1322,35 @@
           <a:p>
             <a:pPr lvl="0"/>
             <a:r>
-              <a:rPr lang="en-US" altLang="zh-TW" smtClean="0"/>
+              <a:rPr lang="en-US" altLang="zh-TW"/>
               <a:t>Edit Master text styles</a:t>
             </a:r>
           </a:p>
           <a:p>
             <a:pPr lvl="1"/>
             <a:r>
-              <a:rPr lang="en-US" altLang="zh-TW" smtClean="0"/>
+              <a:rPr lang="en-US" altLang="zh-TW"/>
               <a:t>Second level</a:t>
             </a:r>
           </a:p>
           <a:p>
             <a:pPr lvl="2"/>
             <a:r>
-              <a:rPr lang="en-US" altLang="zh-TW" smtClean="0"/>
+              <a:rPr lang="en-US" altLang="zh-TW"/>
               <a:t>Third level</a:t>
             </a:r>
           </a:p>
           <a:p>
             <a:pPr lvl="3"/>
             <a:r>
-              <a:rPr lang="en-US" altLang="zh-TW" smtClean="0"/>
+              <a:rPr lang="en-US" altLang="zh-TW"/>
               <a:t>Fourth level</a:t>
             </a:r>
           </a:p>
           <a:p>
             <a:pPr lvl="4"/>
             <a:r>
-              <a:rPr lang="en-US" altLang="zh-TW" smtClean="0"/>
+              <a:rPr lang="en-US" altLang="zh-TW"/>
               <a:t>Fifth level</a:t>
             </a:r>
             <a:endParaRPr lang="zh-TW" altLang="en-US"/>
@@ -1375,7 +1375,7 @@
             <a:fld id="{86B5546F-C09B-4E63-ABC5-F7C86A7E8D66}" type="datetimeFigureOut">
               <a:rPr lang="en-US" smtClean="0"/>
               <a:pPr/>
-              <a:t>10/23/2021</a:t>
+              <a:t>12/14/2024</a:t>
             </a:fld>
             <a:endParaRPr lang="en-US"/>
           </a:p>
@@ -1474,7 +1474,7 @@
           </a:lstStyle>
           <a:p>
             <a:r>
-              <a:rPr lang="en-US" altLang="zh-TW" smtClean="0"/>
+              <a:rPr lang="en-US" altLang="zh-TW"/>
               <a:t>Click to edit Master title style</a:t>
             </a:r>
             <a:endParaRPr lang="zh-TW" altLang="en-US"/>
@@ -1540,7 +1540,7 @@
           <a:p>
             <a:pPr lvl="0"/>
             <a:r>
-              <a:rPr lang="en-US" altLang="zh-TW" smtClean="0"/>
+              <a:rPr lang="en-US" altLang="zh-TW"/>
               <a:t>Edit Master text styles</a:t>
             </a:r>
           </a:p>
@@ -1596,35 +1596,35 @@
           <a:p>
             <a:pPr lvl="0"/>
             <a:r>
-              <a:rPr lang="en-US" altLang="zh-TW" smtClean="0"/>
+              <a:rPr lang="en-US" altLang="zh-TW"/>
               <a:t>Edit Master text styles</a:t>
             </a:r>
           </a:p>
           <a:p>
             <a:pPr lvl="1"/>
             <a:r>
-              <a:rPr lang="en-US" altLang="zh-TW" smtClean="0"/>
+              <a:rPr lang="en-US" altLang="zh-TW"/>
               <a:t>Second level</a:t>
             </a:r>
           </a:p>
           <a:p>
             <a:pPr lvl="2"/>
             <a:r>
-              <a:rPr lang="en-US" altLang="zh-TW" smtClean="0"/>
+              <a:rPr lang="en-US" altLang="zh-TW"/>
               <a:t>Third level</a:t>
             </a:r>
           </a:p>
           <a:p>
             <a:pPr lvl="3"/>
             <a:r>
-              <a:rPr lang="en-US" altLang="zh-TW" smtClean="0"/>
+              <a:rPr lang="en-US" altLang="zh-TW"/>
               <a:t>Fourth level</a:t>
             </a:r>
           </a:p>
           <a:p>
             <a:pPr lvl="4"/>
             <a:r>
-              <a:rPr lang="en-US" altLang="zh-TW" smtClean="0"/>
+              <a:rPr lang="en-US" altLang="zh-TW"/>
               <a:t>Fifth level</a:t>
             </a:r>
             <a:endParaRPr lang="zh-TW" altLang="en-US"/>
@@ -1690,7 +1690,7 @@
           <a:p>
             <a:pPr lvl="0"/>
             <a:r>
-              <a:rPr lang="en-US" altLang="zh-TW" smtClean="0"/>
+              <a:rPr lang="en-US" altLang="zh-TW"/>
               <a:t>Edit Master text styles</a:t>
             </a:r>
           </a:p>
@@ -1746,35 +1746,35 @@
           <a:p>
             <a:pPr lvl="0"/>
             <a:r>
-              <a:rPr lang="en-US" altLang="zh-TW" smtClean="0"/>
+              <a:rPr lang="en-US" altLang="zh-TW"/>
               <a:t>Edit Master text styles</a:t>
             </a:r>
           </a:p>
           <a:p>
             <a:pPr lvl="1"/>
             <a:r>
-              <a:rPr lang="en-US" altLang="zh-TW" smtClean="0"/>
+              <a:rPr lang="en-US" altLang="zh-TW"/>
               <a:t>Second level</a:t>
             </a:r>
           </a:p>
           <a:p>
             <a:pPr lvl="2"/>
             <a:r>
-              <a:rPr lang="en-US" altLang="zh-TW" smtClean="0"/>
+              <a:rPr lang="en-US" altLang="zh-TW"/>
               <a:t>Third level</a:t>
             </a:r>
           </a:p>
           <a:p>
             <a:pPr lvl="3"/>
             <a:r>
-              <a:rPr lang="en-US" altLang="zh-TW" smtClean="0"/>
+              <a:rPr lang="en-US" altLang="zh-TW"/>
               <a:t>Fourth level</a:t>
             </a:r>
           </a:p>
           <a:p>
             <a:pPr lvl="4"/>
             <a:r>
-              <a:rPr lang="en-US" altLang="zh-TW" smtClean="0"/>
+              <a:rPr lang="en-US" altLang="zh-TW"/>
               <a:t>Fifth level</a:t>
             </a:r>
             <a:endParaRPr lang="zh-TW" altLang="en-US"/>
@@ -1799,7 +1799,7 @@
             <a:fld id="{86B5546F-C09B-4E63-ABC5-F7C86A7E8D66}" type="datetimeFigureOut">
               <a:rPr lang="en-US" smtClean="0"/>
               <a:pPr/>
-              <a:t>10/23/2021</a:t>
+              <a:t>12/14/2024</a:t>
             </a:fld>
             <a:endParaRPr lang="en-US"/>
           </a:p>
@@ -1894,7 +1894,7 @@
           <a:lstStyle/>
           <a:p>
             <a:r>
-              <a:rPr lang="en-US" altLang="zh-TW" smtClean="0"/>
+              <a:rPr lang="en-US" altLang="zh-TW"/>
               <a:t>Click to edit Master title style</a:t>
             </a:r>
             <a:endParaRPr lang="zh-TW" altLang="en-US"/>
@@ -1919,7 +1919,7 @@
             <a:fld id="{86B5546F-C09B-4E63-ABC5-F7C86A7E8D66}" type="datetimeFigureOut">
               <a:rPr lang="en-US" smtClean="0"/>
               <a:pPr/>
-              <a:t>10/23/2021</a:t>
+              <a:t>12/14/2024</a:t>
             </a:fld>
             <a:endParaRPr lang="en-US"/>
           </a:p>
@@ -2016,7 +2016,7 @@
             <a:fld id="{86B5546F-C09B-4E63-ABC5-F7C86A7E8D66}" type="datetimeFigureOut">
               <a:rPr lang="en-US" smtClean="0"/>
               <a:pPr/>
-              <a:t>10/23/2021</a:t>
+              <a:t>12/14/2024</a:t>
             </a:fld>
             <a:endParaRPr lang="en-US"/>
           </a:p>
@@ -2120,7 +2120,7 @@
           </a:lstStyle>
           <a:p>
             <a:r>
-              <a:rPr lang="en-US" altLang="zh-TW" smtClean="0"/>
+              <a:rPr lang="en-US" altLang="zh-TW"/>
               <a:t>Click to edit Master title style</a:t>
             </a:r>
             <a:endParaRPr lang="zh-TW" altLang="en-US"/>
@@ -2177,35 +2177,35 @@
           <a:p>
             <a:pPr lvl="0"/>
             <a:r>
-              <a:rPr lang="en-US" altLang="zh-TW" smtClean="0"/>
+              <a:rPr lang="en-US" altLang="zh-TW"/>
               <a:t>Edit Master text styles</a:t>
             </a:r>
           </a:p>
           <a:p>
             <a:pPr lvl="1"/>
             <a:r>
-              <a:rPr lang="en-US" altLang="zh-TW" smtClean="0"/>
+              <a:rPr lang="en-US" altLang="zh-TW"/>
               <a:t>Second level</a:t>
             </a:r>
           </a:p>
           <a:p>
             <a:pPr lvl="2"/>
             <a:r>
-              <a:rPr lang="en-US" altLang="zh-TW" smtClean="0"/>
+              <a:rPr lang="en-US" altLang="zh-TW"/>
               <a:t>Third level</a:t>
             </a:r>
           </a:p>
           <a:p>
             <a:pPr lvl="3"/>
             <a:r>
-              <a:rPr lang="en-US" altLang="zh-TW" smtClean="0"/>
+              <a:rPr lang="en-US" altLang="zh-TW"/>
               <a:t>Fourth level</a:t>
             </a:r>
           </a:p>
           <a:p>
             <a:pPr lvl="4"/>
             <a:r>
-              <a:rPr lang="en-US" altLang="zh-TW" smtClean="0"/>
+              <a:rPr lang="en-US" altLang="zh-TW"/>
               <a:t>Fifth level</a:t>
             </a:r>
             <a:endParaRPr lang="zh-TW" altLang="en-US"/>
@@ -2271,7 +2271,7 @@
           <a:p>
             <a:pPr lvl="0"/>
             <a:r>
-              <a:rPr lang="en-US" altLang="zh-TW" smtClean="0"/>
+              <a:rPr lang="en-US" altLang="zh-TW"/>
               <a:t>Edit Master text styles</a:t>
             </a:r>
           </a:p>
@@ -2295,7 +2295,7 @@
             <a:fld id="{86B5546F-C09B-4E63-ABC5-F7C86A7E8D66}" type="datetimeFigureOut">
               <a:rPr lang="en-US" smtClean="0"/>
               <a:pPr/>
-              <a:t>10/23/2021</a:t>
+              <a:t>12/14/2024</a:t>
             </a:fld>
             <a:endParaRPr lang="en-US"/>
           </a:p>
@@ -2399,7 +2399,7 @@
           </a:lstStyle>
           <a:p>
             <a:r>
-              <a:rPr lang="en-US" altLang="zh-TW" smtClean="0"/>
+              <a:rPr lang="en-US" altLang="zh-TW"/>
               <a:t>Click to edit Master title style</a:t>
             </a:r>
             <a:endParaRPr lang="zh-TW" altLang="en-US"/>
@@ -2464,7 +2464,7 @@
           </a:lstStyle>
           <a:p>
             <a:r>
-              <a:rPr lang="en-US" altLang="zh-TW" smtClean="0"/>
+              <a:rPr lang="en-US" altLang="zh-TW"/>
               <a:t>Click icon to add picture</a:t>
             </a:r>
             <a:endParaRPr lang="zh-TW" altLang="en-US"/>
@@ -2530,7 +2530,7 @@
           <a:p>
             <a:pPr lvl="0"/>
             <a:r>
-              <a:rPr lang="en-US" altLang="zh-TW" smtClean="0"/>
+              <a:rPr lang="en-US" altLang="zh-TW"/>
               <a:t>Edit Master text styles</a:t>
             </a:r>
           </a:p>
@@ -2554,7 +2554,7 @@
             <a:fld id="{86B5546F-C09B-4E63-ABC5-F7C86A7E8D66}" type="datetimeFigureOut">
               <a:rPr lang="en-US" smtClean="0"/>
               <a:pPr/>
-              <a:t>10/23/2021</a:t>
+              <a:t>12/14/2024</a:t>
             </a:fld>
             <a:endParaRPr lang="en-US"/>
           </a:p>
@@ -2669,10 +2669,9 @@
           <a:lstStyle/>
           <a:p>
             <a:r>
-              <a:rPr lang="zh-TW" altLang="en-US" smtClean="0"/>
+              <a:rPr lang="zh-TW" altLang="en-US"/>
               <a:t>按一下以編輯母片標題樣式</a:t>
             </a:r>
-            <a:endParaRPr lang="zh-TW" altLang="en-US"/>
           </a:p>
         </p:txBody>
       </p:sp>
@@ -2703,38 +2702,37 @@
           <a:p>
             <a:pPr lvl="0"/>
             <a:r>
-              <a:rPr lang="zh-TW" altLang="en-US" smtClean="0"/>
+              <a:rPr lang="zh-TW" altLang="en-US"/>
               <a:t>按一下以編輯母片文字樣式</a:t>
             </a:r>
           </a:p>
           <a:p>
             <a:pPr lvl="1"/>
             <a:r>
-              <a:rPr lang="zh-TW" altLang="en-US" smtClean="0"/>
+              <a:rPr lang="zh-TW" altLang="en-US"/>
               <a:t>第二層</a:t>
             </a:r>
           </a:p>
           <a:p>
             <a:pPr lvl="2"/>
             <a:r>
-              <a:rPr lang="zh-TW" altLang="en-US" smtClean="0"/>
+              <a:rPr lang="zh-TW" altLang="en-US"/>
               <a:t>第三層</a:t>
             </a:r>
           </a:p>
           <a:p>
             <a:pPr lvl="3"/>
             <a:r>
-              <a:rPr lang="zh-TW" altLang="en-US" smtClean="0"/>
+              <a:rPr lang="zh-TW" altLang="en-US"/>
               <a:t>第四層</a:t>
             </a:r>
           </a:p>
           <a:p>
             <a:pPr lvl="4"/>
             <a:r>
-              <a:rPr lang="zh-TW" altLang="en-US" smtClean="0"/>
+              <a:rPr lang="zh-TW" altLang="en-US"/>
               <a:t>第五層</a:t>
             </a:r>
-            <a:endParaRPr lang="zh-TW" altLang="en-US"/>
           </a:p>
         </p:txBody>
       </p:sp>
@@ -2774,7 +2772,7 @@
             <a:fld id="{86B5546F-C09B-4E63-ABC5-F7C86A7E8D66}" type="datetimeFigureOut">
               <a:rPr lang="en-US" smtClean="0"/>
               <a:pPr/>
-              <a:t>10/23/2021</a:t>
+              <a:t>12/14/2024</a:t>
             </a:fld>
             <a:endParaRPr lang="en-US"/>
           </a:p>
@@ -3226,20 +3224,10 @@
                 <a:latin typeface="微軟正黑體" pitchFamily="34" charset="-120"/>
                 <a:ea typeface="微軟正黑體" pitchFamily="34" charset="-120"/>
               </a:rPr>
-              <a:t>詩</a:t>
-            </a:r>
-            <a:r>
-              <a:rPr lang="zh-CN" altLang="en-US" b="1" dirty="0" smtClean="0">
-                <a:solidFill>
-                  <a:srgbClr val="000066"/>
-                </a:solidFill>
-                <a:latin typeface="微軟正黑體" pitchFamily="34" charset="-120"/>
-                <a:ea typeface="微軟正黑體" pitchFamily="34" charset="-120"/>
-              </a:rPr>
-              <a:t>篇 </a:t>
-            </a:r>
-            <a:r>
-              <a:rPr lang="en-US" altLang="zh-CN" b="1" smtClean="0">
+              <a:t>詩篇 </a:t>
+            </a:r>
+            <a:r>
+              <a:rPr lang="en-US" altLang="zh-CN" b="1">
                 <a:solidFill>
                   <a:srgbClr val="000066"/>
                 </a:solidFill>
@@ -3263,13 +3251,6 @@
   <p:clrMapOvr>
     <a:masterClrMapping/>
   </p:clrMapOvr>
-  <p:timing>
-    <p:tnLst>
-      <p:par>
-        <p:cTn id="1" dur="indefinite" restart="never" nodeType="tmRoot"/>
-      </p:par>
-    </p:tnLst>
-  </p:timing>
 </p:sld>
 </file>
 
@@ -3313,16 +3294,6 @@
           <a:lstStyle/>
           <a:p>
             <a:r>
-              <a:rPr lang="zh-TW" altLang="en-US" sz="6400" dirty="0" smtClean="0">
-                <a:solidFill>
-                  <a:srgbClr val="660033"/>
-                </a:solidFill>
-                <a:latin typeface="微軟正黑體" pitchFamily="34" charset="-120"/>
-                <a:ea typeface="微軟正黑體" pitchFamily="34" charset="-120"/>
-              </a:rPr>
-              <a:t>萬</a:t>
-            </a:r>
-            <a:r>
               <a:rPr lang="zh-TW" altLang="en-US" sz="6400" dirty="0">
                 <a:solidFill>
                   <a:srgbClr val="660033"/>
@@ -3330,37 +3301,17 @@
                 <a:latin typeface="微軟正黑體" pitchFamily="34" charset="-120"/>
                 <a:ea typeface="微軟正黑體" pitchFamily="34" charset="-120"/>
               </a:rPr>
-              <a:t>軍之耶和華啊</a:t>
-            </a:r>
-            <a:r>
-              <a:rPr lang="zh-TW" altLang="en-US" sz="6400" dirty="0" smtClean="0">
-                <a:solidFill>
-                  <a:srgbClr val="660033"/>
-                </a:solidFill>
-                <a:latin typeface="微軟正黑體" pitchFamily="34" charset="-120"/>
-                <a:ea typeface="微軟正黑體" pitchFamily="34" charset="-120"/>
-              </a:rPr>
-              <a:t>，</a:t>
-            </a:r>
-            <a:r>
-              <a:rPr lang="zh-CN" altLang="en-US" sz="6400" dirty="0" smtClean="0">
-                <a:solidFill>
-                  <a:srgbClr val="660033"/>
-                </a:solidFill>
-                <a:latin typeface="微軟正黑體" pitchFamily="34" charset="-120"/>
-                <a:ea typeface="微軟正黑體" pitchFamily="34" charset="-120"/>
-              </a:rPr>
-              <a:t>袮</a:t>
-            </a:r>
-            <a:r>
-              <a:rPr lang="zh-TW" altLang="en-US" sz="6400" dirty="0" smtClean="0">
-                <a:solidFill>
-                  <a:srgbClr val="660033"/>
-                </a:solidFill>
-                <a:latin typeface="微軟正黑體" pitchFamily="34" charset="-120"/>
-                <a:ea typeface="微軟正黑體" pitchFamily="34" charset="-120"/>
-              </a:rPr>
-              <a:t>的</a:t>
+              <a:t>萬軍之耶和華啊，</a:t>
+            </a:r>
+            <a:r>
+              <a:rPr lang="zh-CN" altLang="en-US" sz="6400" dirty="0">
+                <a:solidFill>
+                  <a:srgbClr val="660033"/>
+                </a:solidFill>
+                <a:latin typeface="微軟正黑體" pitchFamily="34" charset="-120"/>
+                <a:ea typeface="微軟正黑體" pitchFamily="34" charset="-120"/>
+              </a:rPr>
+              <a:t>祢</a:t>
             </a:r>
             <a:r>
               <a:rPr lang="zh-TW" altLang="en-US" sz="6400" dirty="0">
@@ -3370,7 +3321,7 @@
                 <a:latin typeface="微軟正黑體" pitchFamily="34" charset="-120"/>
                 <a:ea typeface="微軟正黑體" pitchFamily="34" charset="-120"/>
               </a:rPr>
-              <a:t>居所何等可愛！</a:t>
+              <a:t>的居所何等可愛！</a:t>
             </a:r>
             <a:r>
               <a:rPr lang="en-US" altLang="zh-TW" sz="6400" dirty="0">
@@ -3385,16 +3336,6 @@
           </a:p>
           <a:p>
             <a:r>
-              <a:rPr lang="zh-TW" altLang="en-US" sz="6400" b="1" dirty="0" smtClean="0">
-                <a:solidFill>
-                  <a:srgbClr val="660033"/>
-                </a:solidFill>
-                <a:latin typeface="微軟正黑體" pitchFamily="34" charset="-120"/>
-                <a:ea typeface="微軟正黑體" pitchFamily="34" charset="-120"/>
-              </a:rPr>
-              <a:t>我</a:t>
-            </a:r>
-            <a:r>
               <a:rPr lang="zh-TW" altLang="en-US" sz="6400" b="1" dirty="0">
                 <a:solidFill>
                   <a:srgbClr val="660033"/>
@@ -3402,7 +3343,7 @@
                 <a:latin typeface="微軟正黑體" pitchFamily="34" charset="-120"/>
                 <a:ea typeface="微軟正黑體" pitchFamily="34" charset="-120"/>
               </a:rPr>
-              <a:t>羨慕渴想耶和華的院宇；我的心腸，我的肉體向永生神呼籲。</a:t>
+              <a:t>我羨慕渴想耶和華的院宇；我的心腸，我的肉體向永生神呼籲。</a:t>
             </a:r>
             <a:r>
               <a:rPr lang="en-US" altLang="zh-TW" sz="6400" b="1" dirty="0">
@@ -3470,16 +3411,6 @@
           <a:lstStyle/>
           <a:p>
             <a:r>
-              <a:rPr lang="zh-TW" altLang="en-US" sz="6400" dirty="0" smtClean="0">
-                <a:solidFill>
-                  <a:srgbClr val="660033"/>
-                </a:solidFill>
-                <a:latin typeface="微軟正黑體" pitchFamily="34" charset="-120"/>
-                <a:ea typeface="微軟正黑體" pitchFamily="34" charset="-120"/>
-              </a:rPr>
-              <a:t>萬</a:t>
-            </a:r>
-            <a:r>
               <a:rPr lang="zh-TW" altLang="en-US" sz="6400" dirty="0">
                 <a:solidFill>
                   <a:srgbClr val="660033"/>
@@ -3487,17 +3418,7 @@
                 <a:latin typeface="微軟正黑體" pitchFamily="34" charset="-120"/>
                 <a:ea typeface="微軟正黑體" pitchFamily="34" charset="-120"/>
               </a:rPr>
-              <a:t>軍之耶和華我的王，我的神啊，</a:t>
-            </a:r>
-            <a:r>
-              <a:rPr lang="zh-TW" altLang="en-US" sz="6400" dirty="0" smtClean="0">
-                <a:solidFill>
-                  <a:srgbClr val="660033"/>
-                </a:solidFill>
-                <a:latin typeface="微軟正黑體" pitchFamily="34" charset="-120"/>
-                <a:ea typeface="微軟正黑體" pitchFamily="34" charset="-120"/>
-              </a:rPr>
-              <a:t>在</a:t>
+              <a:t>萬軍之耶和華我的王，我的神啊，在</a:t>
             </a:r>
             <a:r>
               <a:rPr lang="zh-CN" altLang="en-US" sz="6400" dirty="0">
@@ -3507,17 +3428,7 @@
                 <a:latin typeface="微軟正黑體" pitchFamily="34" charset="-120"/>
                 <a:ea typeface="微軟正黑體" pitchFamily="34" charset="-120"/>
               </a:rPr>
-              <a:t>袮</a:t>
-            </a:r>
-            <a:r>
-              <a:rPr lang="zh-TW" altLang="en-US" sz="6400" dirty="0" smtClean="0">
-                <a:solidFill>
-                  <a:srgbClr val="660033"/>
-                </a:solidFill>
-                <a:latin typeface="微軟正黑體" pitchFamily="34" charset="-120"/>
-                <a:ea typeface="微軟正黑體" pitchFamily="34" charset="-120"/>
-              </a:rPr>
-              <a:t>祭</a:t>
+              <a:t>祢</a:t>
             </a:r>
             <a:r>
               <a:rPr lang="zh-TW" altLang="en-US" sz="6400" dirty="0">
@@ -3527,7 +3438,7 @@
                 <a:latin typeface="微軟正黑體" pitchFamily="34" charset="-120"/>
                 <a:ea typeface="微軟正黑體" pitchFamily="34" charset="-120"/>
               </a:rPr>
-              <a:t>壇那裡，麻雀為自己找著房屋，燕子為自己找著菢雛之窩。</a:t>
+              <a:t>祭壇那裡，麻雀為自己找著房屋，燕子為自己找著菢雛之窩。</a:t>
             </a:r>
             <a:r>
               <a:rPr lang="en-US" altLang="zh-TW" sz="6400" dirty="0">
@@ -3542,16 +3453,6 @@
           </a:p>
           <a:p>
             <a:r>
-              <a:rPr lang="zh-TW" altLang="en-US" sz="6400" b="1" dirty="0" smtClean="0">
-                <a:solidFill>
-                  <a:srgbClr val="660033"/>
-                </a:solidFill>
-                <a:latin typeface="微軟正黑體" pitchFamily="34" charset="-120"/>
-                <a:ea typeface="微軟正黑體" pitchFamily="34" charset="-120"/>
-              </a:rPr>
-              <a:t>如</a:t>
-            </a:r>
-            <a:r>
               <a:rPr lang="zh-TW" altLang="en-US" sz="6400" b="1" dirty="0">
                 <a:solidFill>
                   <a:srgbClr val="660033"/>
@@ -3559,17 +3460,7 @@
                 <a:latin typeface="微軟正黑體" pitchFamily="34" charset="-120"/>
                 <a:ea typeface="微軟正黑體" pitchFamily="34" charset="-120"/>
               </a:rPr>
-              <a:t>此住</a:t>
-            </a:r>
-            <a:r>
-              <a:rPr lang="zh-TW" altLang="en-US" sz="6400" b="1" dirty="0" smtClean="0">
-                <a:solidFill>
-                  <a:srgbClr val="660033"/>
-                </a:solidFill>
-                <a:latin typeface="微軟正黑體" pitchFamily="34" charset="-120"/>
-                <a:ea typeface="微軟正黑體" pitchFamily="34" charset="-120"/>
-              </a:rPr>
-              <a:t>在</a:t>
+              <a:t>如此住在</a:t>
             </a:r>
             <a:r>
               <a:rPr lang="zh-CN" altLang="en-US" sz="6400" b="1" dirty="0">
@@ -3579,17 +3470,7 @@
                 <a:latin typeface="微軟正黑體" pitchFamily="34" charset="-120"/>
                 <a:ea typeface="微軟正黑體" pitchFamily="34" charset="-120"/>
               </a:rPr>
-              <a:t>袮</a:t>
-            </a:r>
-            <a:r>
-              <a:rPr lang="zh-TW" altLang="en-US" sz="6400" b="1" dirty="0" smtClean="0">
-                <a:solidFill>
-                  <a:srgbClr val="660033"/>
-                </a:solidFill>
-                <a:latin typeface="微軟正黑體" pitchFamily="34" charset="-120"/>
-                <a:ea typeface="微軟正黑體" pitchFamily="34" charset="-120"/>
-              </a:rPr>
-              <a:t>殿</a:t>
+              <a:t>祢</a:t>
             </a:r>
             <a:r>
               <a:rPr lang="zh-TW" altLang="en-US" sz="6400" b="1" dirty="0">
@@ -3599,30 +3480,20 @@
                 <a:latin typeface="微軟正黑體" pitchFamily="34" charset="-120"/>
                 <a:ea typeface="微軟正黑體" pitchFamily="34" charset="-120"/>
               </a:rPr>
-              <a:t>中的便為有福！他們仍要讚</a:t>
+              <a:t>殿中的便為有福！他們仍要讚美</a:t>
+            </a:r>
+            <a:r>
+              <a:rPr lang="zh-CN" altLang="en-US" sz="6400" b="1" dirty="0">
+                <a:solidFill>
+                  <a:srgbClr val="660033"/>
+                </a:solidFill>
+                <a:latin typeface="微軟正黑體" pitchFamily="34" charset="-120"/>
+                <a:ea typeface="微軟正黑體" pitchFamily="34" charset="-120"/>
+              </a:rPr>
+              <a:t>祢</a:t>
             </a:r>
             <a:r>
               <a:rPr lang="zh-TW" altLang="en-US" sz="6400" b="1" dirty="0">
-                <a:solidFill>
-                  <a:srgbClr val="660033"/>
-                </a:solidFill>
-                <a:latin typeface="微軟正黑體" pitchFamily="34" charset="-120"/>
-                <a:ea typeface="微軟正黑體" pitchFamily="34" charset="-120"/>
-              </a:rPr>
-              <a:t>美</a:t>
-            </a:r>
-            <a:r>
-              <a:rPr lang="zh-CN" altLang="en-US" sz="6400" b="1" dirty="0">
-                <a:solidFill>
-                  <a:srgbClr val="660033"/>
-                </a:solidFill>
-                <a:latin typeface="微軟正黑體" pitchFamily="34" charset="-120"/>
-                <a:ea typeface="微軟正黑體" pitchFamily="34" charset="-120"/>
-              </a:rPr>
-              <a:t>袮</a:t>
-            </a:r>
-            <a:r>
-              <a:rPr lang="zh-TW" altLang="en-US" sz="6400" b="1" dirty="0" smtClean="0">
                 <a:solidFill>
                   <a:srgbClr val="660033"/>
                 </a:solidFill>
@@ -3694,7 +3565,7 @@
           <a:lstStyle/>
           <a:p>
             <a:r>
-              <a:rPr lang="zh-TW" altLang="en-US" sz="6400" dirty="0" smtClean="0">
+              <a:rPr lang="zh-TW" altLang="en-US" sz="6400" dirty="0">
                 <a:solidFill>
                   <a:srgbClr val="660033"/>
                 </a:solidFill>
@@ -3711,17 +3582,7 @@
                 <a:latin typeface="微軟正黑體" pitchFamily="34" charset="-120"/>
                 <a:ea typeface="微軟正黑體" pitchFamily="34" charset="-120"/>
               </a:rPr>
-              <a:t>袮</a:t>
-            </a:r>
-            <a:r>
-              <a:rPr lang="zh-TW" altLang="en-US" sz="6400" dirty="0" smtClean="0">
-                <a:solidFill>
-                  <a:srgbClr val="660033"/>
-                </a:solidFill>
-                <a:latin typeface="微軟正黑體" pitchFamily="34" charset="-120"/>
-                <a:ea typeface="微軟正黑體" pitchFamily="34" charset="-120"/>
-              </a:rPr>
-              <a:t>有</a:t>
+              <a:t>祢</a:t>
             </a:r>
             <a:r>
               <a:rPr lang="zh-TW" altLang="en-US" sz="6400" dirty="0">
@@ -3731,7 +3592,7 @@
                 <a:latin typeface="微軟正黑體" pitchFamily="34" charset="-120"/>
                 <a:ea typeface="微軟正黑體" pitchFamily="34" charset="-120"/>
               </a:rPr>
-              <a:t>力量、心中想往錫安大道的，這人便為有福！</a:t>
+              <a:t>有力量、心中想往錫安大道的，這人便為有福！</a:t>
             </a:r>
             <a:r>
               <a:rPr lang="en-US" altLang="zh-TW" sz="6400" dirty="0">
@@ -3746,16 +3607,6 @@
           </a:p>
           <a:p>
             <a:r>
-              <a:rPr lang="zh-TW" altLang="en-US" sz="6400" b="1" dirty="0" smtClean="0">
-                <a:solidFill>
-                  <a:srgbClr val="660033"/>
-                </a:solidFill>
-                <a:latin typeface="微軟正黑體" pitchFamily="34" charset="-120"/>
-                <a:ea typeface="微軟正黑體" pitchFamily="34" charset="-120"/>
-              </a:rPr>
-              <a:t>他</a:t>
-            </a:r>
-            <a:r>
               <a:rPr lang="zh-TW" altLang="en-US" sz="6400" b="1" dirty="0">
                 <a:solidFill>
                   <a:srgbClr val="660033"/>
@@ -3763,7 +3614,7 @@
                 <a:latin typeface="微軟正黑體" pitchFamily="34" charset="-120"/>
                 <a:ea typeface="微軟正黑體" pitchFamily="34" charset="-120"/>
               </a:rPr>
-              <a:t>們經過「流淚谷」，叫這谷變為泉源之地；並有秋雨之福蓋滿了全谷。</a:t>
+              <a:t>他們經過「流淚谷」，叫這谷變為泉源之地；並有秋雨之福蓋滿了全谷。</a:t>
             </a:r>
             <a:r>
               <a:rPr lang="en-US" altLang="zh-TW" sz="6400" b="1" dirty="0">
@@ -3860,7 +3711,17 @@
                 <a:latin typeface="微軟正黑體" pitchFamily="34" charset="-120"/>
                 <a:ea typeface="微軟正黑體" pitchFamily="34" charset="-120"/>
               </a:rPr>
-              <a:t>耶和華萬軍之神啊，</a:t>
+              <a:t>耶和華萬軍之神啊，求</a:t>
+            </a:r>
+            <a:r>
+              <a:rPr lang="zh-CN" altLang="en-US" sz="6400" b="1" dirty="0">
+                <a:solidFill>
+                  <a:srgbClr val="660033"/>
+                </a:solidFill>
+                <a:latin typeface="微軟正黑體" pitchFamily="34" charset="-120"/>
+                <a:ea typeface="微軟正黑體" pitchFamily="34" charset="-120"/>
+              </a:rPr>
+              <a:t>祢</a:t>
             </a:r>
             <a:r>
               <a:rPr lang="zh-TW" altLang="en-US" sz="6400" b="1" dirty="0">
@@ -3870,7 +3731,7 @@
                 <a:latin typeface="微軟正黑體" pitchFamily="34" charset="-120"/>
                 <a:ea typeface="微軟正黑體" pitchFamily="34" charset="-120"/>
               </a:rPr>
-              <a:t>求</a:t>
+              <a:t>聽我的禱告！雅各的神啊，求</a:t>
             </a:r>
             <a:r>
               <a:rPr lang="zh-CN" altLang="en-US" sz="6400" b="1" dirty="0">
@@ -3880,7 +3741,7 @@
                 <a:latin typeface="微軟正黑體" pitchFamily="34" charset="-120"/>
                 <a:ea typeface="微軟正黑體" pitchFamily="34" charset="-120"/>
               </a:rPr>
-              <a:t>袮</a:t>
+              <a:t>祢</a:t>
             </a:r>
             <a:r>
               <a:rPr lang="zh-TW" altLang="en-US" sz="6400" b="1" dirty="0">
@@ -3890,57 +3751,7 @@
                 <a:latin typeface="微軟正黑體" pitchFamily="34" charset="-120"/>
                 <a:ea typeface="微軟正黑體" pitchFamily="34" charset="-120"/>
               </a:rPr>
-              <a:t>聽</a:t>
-            </a:r>
-            <a:r>
-              <a:rPr lang="zh-TW" altLang="en-US" sz="6400" b="1" dirty="0">
-                <a:solidFill>
-                  <a:srgbClr val="660033"/>
-                </a:solidFill>
-                <a:latin typeface="微軟正黑體" pitchFamily="34" charset="-120"/>
-                <a:ea typeface="微軟正黑體" pitchFamily="34" charset="-120"/>
-              </a:rPr>
-              <a:t>我的禱告！雅各的神啊，</a:t>
-            </a:r>
-            <a:r>
-              <a:rPr lang="zh-TW" altLang="en-US" sz="6400" b="1" dirty="0">
-                <a:solidFill>
-                  <a:srgbClr val="660033"/>
-                </a:solidFill>
-                <a:latin typeface="微軟正黑體" pitchFamily="34" charset="-120"/>
-                <a:ea typeface="微軟正黑體" pitchFamily="34" charset="-120"/>
-              </a:rPr>
-              <a:t>求</a:t>
-            </a:r>
-            <a:r>
-              <a:rPr lang="zh-CN" altLang="en-US" sz="6400" b="1" dirty="0">
-                <a:solidFill>
-                  <a:srgbClr val="660033"/>
-                </a:solidFill>
-                <a:latin typeface="微軟正黑體" pitchFamily="34" charset="-120"/>
-                <a:ea typeface="微軟正黑體" pitchFamily="34" charset="-120"/>
-              </a:rPr>
-              <a:t>袮</a:t>
-            </a:r>
-            <a:r>
-              <a:rPr lang="zh-TW" altLang="en-US" sz="6400" b="1" dirty="0" smtClean="0">
-                <a:solidFill>
-                  <a:srgbClr val="660033"/>
-                </a:solidFill>
-                <a:latin typeface="微軟正黑體" pitchFamily="34" charset="-120"/>
-                <a:ea typeface="微軟正黑體" pitchFamily="34" charset="-120"/>
-              </a:rPr>
-              <a:t>留</a:t>
-            </a:r>
-            <a:r>
-              <a:rPr lang="zh-TW" altLang="en-US" sz="6400" b="1" dirty="0">
-                <a:solidFill>
-                  <a:srgbClr val="660033"/>
-                </a:solidFill>
-                <a:latin typeface="微軟正黑體" pitchFamily="34" charset="-120"/>
-                <a:ea typeface="微軟正黑體" pitchFamily="34" charset="-120"/>
-              </a:rPr>
-              <a:t>心聽！</a:t>
+              <a:t>留心聽！</a:t>
             </a:r>
             <a:endParaRPr lang="en-US" altLang="zh-TW" sz="6400" b="1" dirty="0">
               <a:solidFill>
@@ -4005,16 +3816,6 @@
           <a:lstStyle/>
           <a:p>
             <a:r>
-              <a:rPr lang="zh-TW" altLang="en-US" sz="6400" dirty="0" smtClean="0">
-                <a:solidFill>
-                  <a:srgbClr val="660033"/>
-                </a:solidFill>
-                <a:latin typeface="微軟正黑體" pitchFamily="34" charset="-120"/>
-                <a:ea typeface="微軟正黑體" pitchFamily="34" charset="-120"/>
-              </a:rPr>
-              <a:t>神</a:t>
-            </a:r>
-            <a:r>
               <a:rPr lang="zh-TW" altLang="en-US" sz="6400" dirty="0">
                 <a:solidFill>
                   <a:srgbClr val="660033"/>
@@ -4022,17 +3823,7 @@
                 <a:latin typeface="微軟正黑體" pitchFamily="34" charset="-120"/>
                 <a:ea typeface="微軟正黑體" pitchFamily="34" charset="-120"/>
               </a:rPr>
-              <a:t>啊</a:t>
-            </a:r>
-            <a:r>
-              <a:rPr lang="zh-TW" altLang="en-US" sz="6400" dirty="0" smtClean="0">
-                <a:solidFill>
-                  <a:srgbClr val="660033"/>
-                </a:solidFill>
-                <a:latin typeface="微軟正黑體" pitchFamily="34" charset="-120"/>
-                <a:ea typeface="微軟正黑體" pitchFamily="34" charset="-120"/>
-              </a:rPr>
-              <a:t>，</a:t>
+              <a:t>神啊，</a:t>
             </a:r>
             <a:r>
               <a:rPr lang="zh-CN" altLang="en-US" sz="6400" dirty="0">
@@ -4042,17 +3833,7 @@
                 <a:latin typeface="微軟正黑體" pitchFamily="34" charset="-120"/>
                 <a:ea typeface="微軟正黑體" pitchFamily="34" charset="-120"/>
               </a:rPr>
-              <a:t>袮</a:t>
-            </a:r>
-            <a:r>
-              <a:rPr lang="zh-TW" altLang="en-US" sz="6400" dirty="0" smtClean="0">
-                <a:solidFill>
-                  <a:srgbClr val="660033"/>
-                </a:solidFill>
-                <a:latin typeface="微軟正黑體" pitchFamily="34" charset="-120"/>
-                <a:ea typeface="微軟正黑體" pitchFamily="34" charset="-120"/>
-              </a:rPr>
-              <a:t>是</a:t>
+              <a:t>祢</a:t>
             </a:r>
             <a:r>
               <a:rPr lang="zh-TW" altLang="en-US" sz="6400" dirty="0">
@@ -4062,17 +3843,7 @@
                 <a:latin typeface="微軟正黑體" pitchFamily="34" charset="-120"/>
                 <a:ea typeface="微軟正黑體" pitchFamily="34" charset="-120"/>
               </a:rPr>
-              <a:t>我們的盾牌；</a:t>
-            </a:r>
-            <a:r>
-              <a:rPr lang="zh-TW" altLang="en-US" sz="6400" dirty="0" smtClean="0">
-                <a:solidFill>
-                  <a:srgbClr val="660033"/>
-                </a:solidFill>
-                <a:latin typeface="微軟正黑體" pitchFamily="34" charset="-120"/>
-                <a:ea typeface="微軟正黑體" pitchFamily="34" charset="-120"/>
-              </a:rPr>
-              <a:t>求</a:t>
+              <a:t>是我們的盾牌；求</a:t>
             </a:r>
             <a:r>
               <a:rPr lang="zh-CN" altLang="en-US" sz="6400" dirty="0">
@@ -4082,17 +3853,7 @@
                 <a:latin typeface="微軟正黑體" pitchFamily="34" charset="-120"/>
                 <a:ea typeface="微軟正黑體" pitchFamily="34" charset="-120"/>
               </a:rPr>
-              <a:t>袮</a:t>
-            </a:r>
-            <a:r>
-              <a:rPr lang="zh-TW" altLang="en-US" sz="6400" dirty="0" smtClean="0">
-                <a:solidFill>
-                  <a:srgbClr val="660033"/>
-                </a:solidFill>
-                <a:latin typeface="微軟正黑體" pitchFamily="34" charset="-120"/>
-                <a:ea typeface="微軟正黑體" pitchFamily="34" charset="-120"/>
-              </a:rPr>
-              <a:t>垂</a:t>
+              <a:t>祢</a:t>
             </a:r>
             <a:r>
               <a:rPr lang="zh-TW" altLang="en-US" sz="6400" dirty="0">
@@ -4102,17 +3863,7 @@
                 <a:latin typeface="微軟正黑體" pitchFamily="34" charset="-120"/>
                 <a:ea typeface="微軟正黑體" pitchFamily="34" charset="-120"/>
               </a:rPr>
-              <a:t>顧觀</a:t>
-            </a:r>
-            <a:r>
-              <a:rPr lang="zh-TW" altLang="en-US" sz="6400" dirty="0" smtClean="0">
-                <a:solidFill>
-                  <a:srgbClr val="660033"/>
-                </a:solidFill>
-                <a:latin typeface="微軟正黑體" pitchFamily="34" charset="-120"/>
-                <a:ea typeface="微軟正黑體" pitchFamily="34" charset="-120"/>
-              </a:rPr>
-              <a:t>看</a:t>
+              <a:t>垂顧觀看</a:t>
             </a:r>
             <a:r>
               <a:rPr lang="zh-CN" altLang="en-US" sz="6400" dirty="0">
@@ -4122,17 +3873,7 @@
                 <a:latin typeface="微軟正黑體" pitchFamily="34" charset="-120"/>
                 <a:ea typeface="微軟正黑體" pitchFamily="34" charset="-120"/>
               </a:rPr>
-              <a:t>袮</a:t>
-            </a:r>
-            <a:r>
-              <a:rPr lang="zh-TW" altLang="en-US" sz="6400" dirty="0" smtClean="0">
-                <a:solidFill>
-                  <a:srgbClr val="660033"/>
-                </a:solidFill>
-                <a:latin typeface="微軟正黑體" pitchFamily="34" charset="-120"/>
-                <a:ea typeface="微軟正黑體" pitchFamily="34" charset="-120"/>
-              </a:rPr>
-              <a:t>受</a:t>
+              <a:t>祢</a:t>
             </a:r>
             <a:r>
               <a:rPr lang="zh-TW" altLang="en-US" sz="6400" dirty="0">
@@ -4142,19 +3883,9 @@
                 <a:latin typeface="微軟正黑體" pitchFamily="34" charset="-120"/>
                 <a:ea typeface="微軟正黑體" pitchFamily="34" charset="-120"/>
               </a:rPr>
-              <a:t>膏者的面</a:t>
-            </a:r>
-            <a:r>
-              <a:rPr lang="zh-TW" altLang="en-US" sz="6400" dirty="0" smtClean="0">
-                <a:solidFill>
-                  <a:srgbClr val="660033"/>
-                </a:solidFill>
-                <a:latin typeface="微軟正黑體" pitchFamily="34" charset="-120"/>
-                <a:ea typeface="微軟正黑體" pitchFamily="34" charset="-120"/>
-              </a:rPr>
-              <a:t>！</a:t>
-            </a:r>
-            <a:endParaRPr lang="en-US" altLang="zh-TW" sz="6400" dirty="0" smtClean="0">
+              <a:t>受膏者的面！</a:t>
+            </a:r>
+            <a:endParaRPr lang="en-US" altLang="zh-TW" sz="6400" dirty="0">
               <a:solidFill>
                 <a:srgbClr val="660033"/>
               </a:solidFill>
@@ -4164,7 +3895,7 @@
           </a:p>
           <a:p>
             <a:r>
-              <a:rPr lang="zh-TW" altLang="en-US" sz="6400" b="1" dirty="0" smtClean="0">
+              <a:rPr lang="zh-TW" altLang="en-US" sz="6400" b="1" dirty="0">
                 <a:solidFill>
                   <a:srgbClr val="660033"/>
                 </a:solidFill>
@@ -4181,17 +3912,7 @@
                 <a:latin typeface="微軟正黑體" pitchFamily="34" charset="-120"/>
                 <a:ea typeface="微軟正黑體" pitchFamily="34" charset="-120"/>
               </a:rPr>
-              <a:t>袮</a:t>
-            </a:r>
-            <a:r>
-              <a:rPr lang="zh-TW" altLang="en-US" sz="6400" b="1" dirty="0" smtClean="0">
-                <a:solidFill>
-                  <a:srgbClr val="660033"/>
-                </a:solidFill>
-                <a:latin typeface="微軟正黑體" pitchFamily="34" charset="-120"/>
-                <a:ea typeface="微軟正黑體" pitchFamily="34" charset="-120"/>
-              </a:rPr>
-              <a:t>的</a:t>
+              <a:t>祢</a:t>
             </a:r>
             <a:r>
               <a:rPr lang="zh-TW" altLang="en-US" sz="6400" b="1" dirty="0">
@@ -4201,7 +3922,7 @@
                 <a:latin typeface="微軟正黑體" pitchFamily="34" charset="-120"/>
                 <a:ea typeface="微軟正黑體" pitchFamily="34" charset="-120"/>
               </a:rPr>
-              <a:t>院宇住一日，勝似在別處住千日；寧可在我神殿中看門，不願住在惡人的帳棚裡。</a:t>
+              <a:t>的院宇住一日，勝似在別處住千日；寧可在我神殿中看門，不願住在惡人的帳棚裡。</a:t>
             </a:r>
             <a:r>
               <a:rPr lang="en-US" altLang="zh-TW" sz="6400" b="1" dirty="0">
@@ -4269,16 +3990,6 @@
           <a:lstStyle/>
           <a:p>
             <a:r>
-              <a:rPr lang="zh-TW" altLang="en-US" sz="6400" dirty="0" smtClean="0">
-                <a:solidFill>
-                  <a:srgbClr val="660033"/>
-                </a:solidFill>
-                <a:latin typeface="微軟正黑體" pitchFamily="34" charset="-120"/>
-                <a:ea typeface="微軟正黑體" pitchFamily="34" charset="-120"/>
-              </a:rPr>
-              <a:t>因</a:t>
-            </a:r>
-            <a:r>
               <a:rPr lang="zh-TW" altLang="en-US" sz="6400" dirty="0">
                 <a:solidFill>
                   <a:srgbClr val="660033"/>
@@ -4286,20 +3997,10 @@
                 <a:latin typeface="微軟正黑體" pitchFamily="34" charset="-120"/>
                 <a:ea typeface="微軟正黑體" pitchFamily="34" charset="-120"/>
               </a:rPr>
-              <a:t>為耶和華  神是日頭，是盾牌，要賜下恩惠和榮耀</a:t>
-            </a:r>
-            <a:r>
-              <a:rPr lang="zh-TW" altLang="en-US" sz="6400" dirty="0" smtClean="0">
-                <a:solidFill>
-                  <a:srgbClr val="660033"/>
-                </a:solidFill>
-                <a:latin typeface="微軟正黑體" pitchFamily="34" charset="-120"/>
-                <a:ea typeface="微軟正黑體" pitchFamily="34" charset="-120"/>
-              </a:rPr>
-              <a:t>。</a:t>
-            </a:r>
-            <a:r>
-              <a:rPr lang="zh-CN" altLang="en-US" sz="6400" dirty="0" smtClean="0">
+              <a:t>因為耶和華  神是日頭，是盾牌，要賜下恩惠和榮耀。</a:t>
+            </a:r>
+            <a:r>
+              <a:rPr lang="zh-CN" altLang="en-US" sz="6400" dirty="0">
                 <a:solidFill>
                   <a:srgbClr val="660033"/>
                 </a:solidFill>
@@ -4309,16 +4010,6 @@
               <a:t>祂</a:t>
             </a:r>
             <a:r>
-              <a:rPr lang="zh-TW" altLang="en-US" sz="6400" dirty="0" smtClean="0">
-                <a:solidFill>
-                  <a:srgbClr val="660033"/>
-                </a:solidFill>
-                <a:latin typeface="微軟正黑體" pitchFamily="34" charset="-120"/>
-                <a:ea typeface="微軟正黑體" pitchFamily="34" charset="-120"/>
-              </a:rPr>
-              <a:t>未</a:t>
-            </a:r>
-            <a:r>
               <a:rPr lang="zh-TW" altLang="en-US" sz="6400" dirty="0">
                 <a:solidFill>
                   <a:srgbClr val="660033"/>
@@ -4326,7 +4017,7 @@
                 <a:latin typeface="微軟正黑體" pitchFamily="34" charset="-120"/>
                 <a:ea typeface="微軟正黑體" pitchFamily="34" charset="-120"/>
               </a:rPr>
-              <a:t>嘗留下一樣好處不給那些行動正直的人。</a:t>
+              <a:t>未嘗留下一樣好處不給那些行動正直的人。</a:t>
             </a:r>
             <a:endParaRPr lang="en-US" altLang="zh-TW" sz="6400" dirty="0">
               <a:solidFill>
@@ -4338,16 +4029,6 @@
           </a:p>
           <a:p>
             <a:r>
-              <a:rPr lang="zh-TW" altLang="en-US" sz="6400" b="1" dirty="0" smtClean="0">
-                <a:solidFill>
-                  <a:srgbClr val="660033"/>
-                </a:solidFill>
-                <a:latin typeface="微軟正黑體" pitchFamily="34" charset="-120"/>
-                <a:ea typeface="微軟正黑體" pitchFamily="34" charset="-120"/>
-              </a:rPr>
-              <a:t>萬</a:t>
-            </a:r>
-            <a:r>
               <a:rPr lang="zh-TW" altLang="en-US" sz="6400" b="1" dirty="0">
                 <a:solidFill>
                   <a:srgbClr val="660033"/>
@@ -4355,17 +4036,7 @@
                 <a:latin typeface="微軟正黑體" pitchFamily="34" charset="-120"/>
                 <a:ea typeface="微軟正黑體" pitchFamily="34" charset="-120"/>
               </a:rPr>
-              <a:t>軍之耶和華啊，倚</a:t>
-            </a:r>
-            <a:r>
-              <a:rPr lang="zh-TW" altLang="en-US" sz="6400" b="1" dirty="0" smtClean="0">
-                <a:solidFill>
-                  <a:srgbClr val="660033"/>
-                </a:solidFill>
-                <a:latin typeface="微軟正黑體" pitchFamily="34" charset="-120"/>
-                <a:ea typeface="微軟正黑體" pitchFamily="34" charset="-120"/>
-              </a:rPr>
-              <a:t>靠</a:t>
+              <a:t>萬軍之耶和華啊，倚靠</a:t>
             </a:r>
             <a:r>
               <a:rPr lang="zh-CN" altLang="en-US" sz="6400" b="1" dirty="0">
@@ -4375,17 +4046,7 @@
                 <a:latin typeface="微軟正黑體" pitchFamily="34" charset="-120"/>
                 <a:ea typeface="微軟正黑體" pitchFamily="34" charset="-120"/>
               </a:rPr>
-              <a:t>袮</a:t>
-            </a:r>
-            <a:r>
-              <a:rPr lang="zh-TW" altLang="en-US" sz="6400" b="1" dirty="0" smtClean="0">
-                <a:solidFill>
-                  <a:srgbClr val="660033"/>
-                </a:solidFill>
-                <a:latin typeface="微軟正黑體" pitchFamily="34" charset="-120"/>
-                <a:ea typeface="微軟正黑體" pitchFamily="34" charset="-120"/>
-              </a:rPr>
-              <a:t>的</a:t>
+              <a:t>祢</a:t>
             </a:r>
             <a:r>
               <a:rPr lang="zh-TW" altLang="en-US" sz="6400" b="1" dirty="0">
@@ -4395,7 +4056,7 @@
                 <a:latin typeface="微軟正黑體" pitchFamily="34" charset="-120"/>
                 <a:ea typeface="微軟正黑體" pitchFamily="34" charset="-120"/>
               </a:rPr>
-              <a:t>人便為有福！</a:t>
+              <a:t>的人便為有福！</a:t>
             </a:r>
             <a:r>
               <a:rPr lang="en-US" altLang="zh-TW" sz="6400" b="1" dirty="0">
